--- a/downloads/investor-pitch.pptx
+++ b/downloads/investor-pitch.pptx
@@ -8,7 +8,11 @@
     <p:sldId id="256" r:id="rId2"/>
     <p:sldId id="257" r:id="rId3"/>
     <p:sldId id="258" r:id="rId4"/>
+    <p:sldId id="261" r:id="rId12"/>
     <p:sldId id="259" r:id="rId5"/>
+    <p:sldId id="262" r:id="rId13"/>
+    <p:sldId id="263" r:id="rId14"/>
+    <p:sldId id="264" r:id="rId15"/>
     <p:sldId id="260" r:id="rId6"/>
   </p:sldIdLst>
   <p:notesMasterIdLst>
@@ -1458,7 +1462,7 @@
         </p:nvSpPr>
         <p:spPr>
           <a:xfrm>
-            <a:off x="640080" y="548640"/>
+            <a:off x="6309360" y="548640"/>
             <a:ext cx="5303520" cy="548640"/>
           </a:xfrm>
           <a:prstGeom prst="rect">
@@ -1497,7 +1501,7 @@
         </p:nvSpPr>
         <p:spPr>
           <a:xfrm>
-            <a:off x="640080" y="1188720"/>
+            <a:off x="6309360" y="1188720"/>
             <a:ext cx="5120640" cy="2194560"/>
           </a:xfrm>
           <a:prstGeom prst="rect">
@@ -1556,7 +1560,7 @@
         </p:nvSpPr>
         <p:spPr>
           <a:xfrm>
-            <a:off x="6309360" y="548640"/>
+            <a:off x="640080" y="548640"/>
             <a:ext cx="5303520" cy="548640"/>
           </a:xfrm>
           <a:prstGeom prst="rect">
@@ -1595,7 +1599,7 @@
         </p:nvSpPr>
         <p:spPr>
           <a:xfrm>
-            <a:off x="6309360" y="1188720"/>
+            <a:off x="640080" y="1188720"/>
             <a:ext cx="5120640" cy="2194560"/>
           </a:xfrm>
           <a:prstGeom prst="rect">
@@ -1699,13 +1703,13 @@
       </p:sp>
       <p:sp>
         <p:nvSpPr>
-          <p:cNvPr id="3" name="Shape 1"/>
-          <p:cNvSpPr/>
-          <p:nvPr/>
-        </p:nvSpPr>
-        <p:spPr>
-          <a:xfrm>
-            <a:off x="1065276" y="2377440"/>
+          <p:cNvPr id="9" name="Shape 7"/>
+          <p:cNvSpPr/>
+          <p:nvPr/>
+        </p:nvSpPr>
+        <p:spPr>
+          <a:xfrm>
+            <a:off x="8014716" y="2377440"/>
             <a:ext cx="3108960" cy="2103120"/>
           </a:xfrm>
           <a:prstGeom prst="roundRect">
@@ -1721,13 +1725,13 @@
       </p:sp>
       <p:sp>
         <p:nvSpPr>
-          <p:cNvPr id="4" name="Text 2"/>
-          <p:cNvSpPr/>
-          <p:nvPr/>
-        </p:nvSpPr>
-        <p:spPr>
-          <a:xfrm>
-            <a:off x="1065276" y="2697480"/>
+          <p:cNvPr id="10" name="Text 8"/>
+          <p:cNvSpPr/>
+          <p:nvPr/>
+        </p:nvSpPr>
+        <p:spPr>
+          <a:xfrm>
+            <a:off x="8014716" y="2697480"/>
             <a:ext cx="3108960" cy="822960"/>
           </a:xfrm>
           <a:prstGeom prst="rect">
@@ -1757,13 +1761,13 @@
       </p:sp>
       <p:sp>
         <p:nvSpPr>
-          <p:cNvPr id="5" name="Text 3"/>
-          <p:cNvSpPr/>
-          <p:nvPr/>
-        </p:nvSpPr>
-        <p:spPr>
-          <a:xfrm>
-            <a:off x="1065276" y="3611880"/>
+          <p:cNvPr id="11" name="Text 9"/>
+          <p:cNvSpPr/>
+          <p:nvPr/>
+        </p:nvSpPr>
+        <p:spPr>
+          <a:xfrm>
+            <a:off x="8014716" y="3611880"/>
             <a:ext cx="3108960" cy="457200"/>
           </a:xfrm>
           <a:prstGeom prst="rect">
@@ -1788,7 +1792,7 @@
                 <a:ea typeface="Calibri" pitchFamily="34" charset="-122"/>
                 <a:cs typeface="Calibri" pitchFamily="34" charset="-120"/>
               </a:rPr>
-              <a:t>שוק כולל (TAM)</a:t>
+              <a:t>השוק הכולל (TAM)</a:t>
             </a:r>
             <a:endParaRPr lang="en-US" sz="1400" dirty="0"/>
           </a:p>
@@ -1885,7 +1889,7 @@
                 <a:ea typeface="Calibri" pitchFamily="34" charset="-122"/>
                 <a:cs typeface="Calibri" pitchFamily="34" charset="-120"/>
               </a:rPr>
-              <a:t>שוק בר-השגה (SAM)</a:t>
+              <a:t>השוק הזמין (SAM)</a:t>
             </a:r>
             <a:endParaRPr lang="en-US" sz="1400" dirty="0"/>
           </a:p>
@@ -1893,13 +1897,13 @@
       </p:sp>
       <p:sp>
         <p:nvSpPr>
-          <p:cNvPr id="9" name="Shape 7"/>
-          <p:cNvSpPr/>
-          <p:nvPr/>
-        </p:nvSpPr>
-        <p:spPr>
-          <a:xfrm>
-            <a:off x="8014716" y="2377440"/>
+          <p:cNvPr id="3" name="Shape 1"/>
+          <p:cNvSpPr/>
+          <p:nvPr/>
+        </p:nvSpPr>
+        <p:spPr>
+          <a:xfrm>
+            <a:off x="1065276" y="2377440"/>
             <a:ext cx="3108960" cy="2103120"/>
           </a:xfrm>
           <a:prstGeom prst="roundRect">
@@ -1915,13 +1919,13 @@
       </p:sp>
       <p:sp>
         <p:nvSpPr>
-          <p:cNvPr id="10" name="Text 8"/>
-          <p:cNvSpPr/>
-          <p:nvPr/>
-        </p:nvSpPr>
-        <p:spPr>
-          <a:xfrm>
-            <a:off x="8014716" y="2697480"/>
+          <p:cNvPr id="4" name="Text 2"/>
+          <p:cNvSpPr/>
+          <p:nvPr/>
+        </p:nvSpPr>
+        <p:spPr>
+          <a:xfrm>
+            <a:off x="1065276" y="2697480"/>
             <a:ext cx="3108960" cy="822960"/>
           </a:xfrm>
           <a:prstGeom prst="rect">
@@ -1951,13 +1955,13 @@
       </p:sp>
       <p:sp>
         <p:nvSpPr>
-          <p:cNvPr id="11" name="Text 9"/>
-          <p:cNvSpPr/>
-          <p:nvPr/>
-        </p:nvSpPr>
-        <p:spPr>
-          <a:xfrm>
-            <a:off x="8014716" y="3611880"/>
+          <p:cNvPr id="5" name="Text 3"/>
+          <p:cNvSpPr/>
+          <p:nvPr/>
+        </p:nvSpPr>
+        <p:spPr>
+          <a:xfrm>
+            <a:off x="1065276" y="3611880"/>
             <a:ext cx="3108960" cy="457200"/>
           </a:xfrm>
           <a:prstGeom prst="rect">
@@ -1982,7 +1986,7 @@
                 <a:ea typeface="Calibri" pitchFamily="34" charset="-122"/>
                 <a:cs typeface="Calibri" pitchFamily="34" charset="-120"/>
               </a:rPr>
-              <a:t>יעד ראשוני (SOM)</a:t>
+              <a:t>נתח השוק היעד (SOM)</a:t>
             </a:r>
             <a:endParaRPr lang="en-US" sz="1400" dirty="0"/>
           </a:p>
@@ -2526,7 +2530,7 @@
                 <a:ea typeface="Calibri" pitchFamily="34" charset="-122"/>
                 <a:cs typeface="Calibri" pitchFamily="34" charset="-120"/>
               </a:rPr>
-              <a:t>$1.5M כדי להאיץ צמיחה ולהרחיב את הצוות</a:t>
+              <a:t>גיוס של $1.5M להאצת הצמיחה ולהרחבת הצוות</a:t>
             </a:r>
             <a:endParaRPr lang="en-US" sz="1400" dirty="0"/>
           </a:p>
@@ -2592,6 +2596,2143 @@
               <a:t>founders@yourstartup.co</a:t>
             </a:r>
             <a:endParaRPr lang="en-US" sz="1300" dirty="0"/>
+          </a:p>
+        </p:txBody>
+      </p:sp>
+    </p:spTree>
+  </p:cSld>
+  <p:clrMapOvr>
+    <a:masterClrMapping/>
+  </p:clrMapOvr>
+</p:sld>
+</file>
+
+<file path=ppt/slides/slide6.xml><?xml version="1.0" encoding="utf-8"?>
+<p:sld xmlns:a="http://schemas.openxmlformats.org/drawingml/2006/main" xmlns:p="http://schemas.openxmlformats.org/presentationml/2006/main" xmlns:r="http://schemas.openxmlformats.org/officeDocument/2006/relationships">
+  <p:cSld>
+    <p:bg>
+      <p:bgPr>
+        <a:solidFill>
+          <a:srgbClr val="FFFFFF"/>
+        </a:solidFill>
+      </p:bgPr>
+    </p:bg>
+    <p:spTree>
+      <p:nvGrpSpPr>
+        <p:cNvPr id="2" name=""/>
+        <p:cNvGrpSpPr/>
+        <p:nvPr/>
+      </p:nvGrpSpPr>
+      <p:grpSpPr/>
+      <p:sp>
+        <p:nvSpPr>
+          <p:cNvPr id="3" name="Text 0"/>
+          <p:cNvSpPr/>
+          <p:nvPr/>
+        </p:nvSpPr>
+        <p:spPr>
+          <a:xfrm>
+            <a:off x="640080" y="548640"/>
+            <a:ext cx="10881360" cy="731520"/>
+          </a:xfrm>
+          <a:prstGeom prst="rect">
+            <a:avLst/>
+          </a:prstGeom>
+          <a:noFill/>
+          <a:ln/>
+        </p:spPr>
+        <p:txBody>
+          <a:bodyPr wrap="square" rtlCol="0" anchor="ctr"/>
+          <a:lstStyle/>
+          <a:p>
+            <a:pPr rtl="1" algn="r" indent="0" marL="0">
+              <a:buNone/>
+            </a:pPr>
+            <a:r>
+              <a:rPr lang="en-US" sz="3200" b="1" dirty="0">
+                <a:solidFill>
+                  <a:srgbClr val="7C3AED"/>
+                </a:solidFill>
+                <a:latin typeface="Calibri" pitchFamily="34" charset="0"/>
+                <a:ea typeface="Calibri" pitchFamily="34" charset="-122"/>
+                <a:cs typeface="Calibri" pitchFamily="34" charset="-120"/>
+              </a:rPr>
+              <a:t>מודל עסקי: איך אנחנו מרוויחים</a:t>
+            </a:r>
+            <a:endParaRPr lang="en-US" sz="3200" dirty="0"/>
+          </a:p>
+        </p:txBody>
+      </p:sp>
+      <p:sp>
+        <p:nvSpPr>
+          <p:cNvPr id="14" name="Shape 7"/>
+          <p:cNvSpPr/>
+          <p:nvPr/>
+        </p:nvSpPr>
+        <p:spPr>
+          <a:xfrm>
+            <a:off x="8106156" y="2011680"/>
+            <a:ext cx="3291840" cy="3108960"/>
+          </a:xfrm>
+          <a:prstGeom prst="roundRect">
+            <a:avLst>
+              <a:gd name="adj" fmla="val 2353"/>
+            </a:avLst>
+          </a:prstGeom>
+          <a:solidFill>
+            <a:srgbClr val="EEE6FB"/>
+          </a:solidFill>
+          <a:ln/>
+        </p:spPr>
+      </p:sp>
+      <p:pic>
+        <p:nvPicPr>
+          <p:cNvPr id="15" name="Image 2" descr="preencoded.png">    </p:cNvPr>
+          <p:cNvPicPr>
+            <a:picLocks noChangeAspect="1"/>
+          </p:cNvPicPr>
+          <p:nvPr/>
+        </p:nvPicPr>
+        <p:blipFill>
+          <a:blip r:embed="rId4"/>
+          <a:stretch>
+            <a:fillRect/>
+          </a:stretch>
+        </p:blipFill>
+        <p:spPr>
+          <a:xfrm>
+            <a:off x="9432036" y="2377440"/>
+            <a:ext cx="640080" cy="640080"/>
+          </a:xfrm>
+          <a:prstGeom prst="rect">
+            <a:avLst/>
+          </a:prstGeom>
+        </p:spPr>
+      </p:pic>
+      <p:sp>
+        <p:nvSpPr>
+          <p:cNvPr id="16" name="Text 8"/>
+          <p:cNvSpPr/>
+          <p:nvPr/>
+        </p:nvSpPr>
+        <p:spPr>
+          <a:xfrm>
+            <a:off x="8106156" y="3291840"/>
+            <a:ext cx="3291840" cy="640080"/>
+          </a:xfrm>
+          <a:prstGeom prst="rect">
+            <a:avLst/>
+          </a:prstGeom>
+          <a:noFill/>
+          <a:ln/>
+        </p:spPr>
+        <p:txBody>
+          <a:bodyPr wrap="square" rtlCol="0" anchor="ctr"/>
+          <a:lstStyle/>
+          <a:p>
+            <a:pPr algn="ctr" indent="0" marL="0">
+              <a:buNone/>
+            </a:pPr>
+            <a:r>
+              <a:rPr lang="en-US" sz="2600" b="1" dirty="0">
+                <a:solidFill>
+                  <a:srgbClr val="7C3AED"/>
+                </a:solidFill>
+              </a:rPr>
+              <a:t>₪99</a:t>
+            </a:r>
+            <a:endParaRPr lang="en-US" sz="2600" dirty="0"/>
+          </a:p>
+        </p:txBody>
+      </p:sp>
+      <p:sp>
+        <p:nvSpPr>
+          <p:cNvPr id="17" name="Text 9"/>
+          <p:cNvSpPr/>
+          <p:nvPr/>
+        </p:nvSpPr>
+        <p:spPr>
+          <a:xfrm>
+            <a:off x="8106156" y="3977640"/>
+            <a:ext cx="3291840" cy="457200"/>
+          </a:xfrm>
+          <a:prstGeom prst="rect">
+            <a:avLst/>
+          </a:prstGeom>
+          <a:noFill/>
+          <a:ln/>
+        </p:spPr>
+        <p:txBody>
+          <a:bodyPr wrap="square" rtlCol="0" anchor="ctr"/>
+          <a:lstStyle/>
+          <a:p>
+            <a:pPr rtl="1" algn="ctr" indent="0" marL="0">
+              <a:buNone/>
+            </a:pPr>
+            <a:r>
+              <a:rPr lang="en-US" sz="1300" dirty="0">
+                <a:solidFill>
+                  <a:srgbClr val="1A1A1A"/>
+                </a:solidFill>
+                <a:latin typeface="Calibri" pitchFamily="34" charset="0"/>
+                <a:ea typeface="Calibri" pitchFamily="34" charset="-122"/>
+                <a:cs typeface="Calibri" pitchFamily="34" charset="-120"/>
+              </a:rPr>
+              <a:t>מנוי חודשי לעסק</a:t>
+            </a:r>
+            <a:endParaRPr lang="en-US" sz="1300" dirty="0"/>
+          </a:p>
+        </p:txBody>
+      </p:sp>
+      <p:sp>
+        <p:nvSpPr>
+          <p:cNvPr id="18" name="Text 9"/>
+          <p:cNvSpPr/>
+          <p:nvPr/>
+        </p:nvSpPr>
+        <p:spPr>
+          <a:xfrm>
+            <a:off x="8106156" y="4389120"/>
+            <a:ext cx="3291840" cy="457200"/>
+          </a:xfrm>
+          <a:prstGeom prst="rect">
+            <a:avLst/>
+          </a:prstGeom>
+          <a:noFill/>
+          <a:ln/>
+        </p:spPr>
+        <p:txBody>
+          <a:bodyPr wrap="square" rtlCol="0" anchor="ctr"/>
+          <a:lstStyle/>
+          <a:p>
+            <a:pPr rtl="1" algn="ctr" indent="0" marL="0">
+              <a:buNone/>
+            </a:pPr>
+            <a:r>
+              <a:rPr lang="en-US" sz="1150" dirty="0">
+                <a:solidFill>
+                  <a:srgbClr val="6B6B6B"/>
+                </a:solidFill>
+                <a:latin typeface="Calibri" pitchFamily="34" charset="0"/>
+                <a:ea typeface="Calibri" pitchFamily="34" charset="-122"/>
+                <a:cs typeface="Calibri" pitchFamily="34" charset="-120"/>
+              </a:rPr>
+              <a:t>מנוי SaaS, ללא התחייבות, עם חבילות לפי גודל</a:t>
+            </a:r>
+            <a:endParaRPr lang="en-US" sz="1150" dirty="0"/>
+          </a:p>
+        </p:txBody>
+      </p:sp>
+      <p:sp>
+        <p:nvSpPr>
+          <p:cNvPr id="9" name="Shape 4"/>
+          <p:cNvSpPr/>
+          <p:nvPr/>
+        </p:nvSpPr>
+        <p:spPr>
+          <a:xfrm>
+            <a:off x="4448556" y="2011680"/>
+            <a:ext cx="3291840" cy="3108960"/>
+          </a:xfrm>
+          <a:prstGeom prst="roundRect">
+            <a:avLst>
+              <a:gd name="adj" fmla="val 2353"/>
+            </a:avLst>
+          </a:prstGeom>
+          <a:solidFill>
+            <a:srgbClr val="EEE6FB"/>
+          </a:solidFill>
+          <a:ln/>
+        </p:spPr>
+      </p:sp>
+      <p:pic>
+        <p:nvPicPr>
+          <p:cNvPr id="10" name="Image 1" descr="preencoded.png">    </p:cNvPr>
+          <p:cNvPicPr>
+            <a:picLocks noChangeAspect="1"/>
+          </p:cNvPicPr>
+          <p:nvPr/>
+        </p:nvPicPr>
+        <p:blipFill>
+          <a:blip r:embed="rId3"/>
+          <a:stretch>
+            <a:fillRect/>
+          </a:stretch>
+        </p:blipFill>
+        <p:spPr>
+          <a:xfrm>
+            <a:off x="5774436" y="2377440"/>
+            <a:ext cx="640080" cy="640080"/>
+          </a:xfrm>
+          <a:prstGeom prst="rect">
+            <a:avLst/>
+          </a:prstGeom>
+        </p:spPr>
+      </p:pic>
+      <p:sp>
+        <p:nvSpPr>
+          <p:cNvPr id="11" name="Text 5"/>
+          <p:cNvSpPr/>
+          <p:nvPr/>
+        </p:nvSpPr>
+        <p:spPr>
+          <a:xfrm>
+            <a:off x="4448556" y="3291840"/>
+            <a:ext cx="3291840" cy="640080"/>
+          </a:xfrm>
+          <a:prstGeom prst="rect">
+            <a:avLst/>
+          </a:prstGeom>
+          <a:noFill/>
+          <a:ln/>
+        </p:spPr>
+        <p:txBody>
+          <a:bodyPr wrap="square" rtlCol="0" anchor="ctr"/>
+          <a:lstStyle/>
+          <a:p>
+            <a:pPr algn="ctr" indent="0" marL="0">
+              <a:buNone/>
+            </a:pPr>
+            <a:r>
+              <a:rPr lang="en-US" sz="2600" b="1" dirty="0">
+                <a:solidFill>
+                  <a:srgbClr val="7C3AED"/>
+                </a:solidFill>
+              </a:rPr>
+              <a:t>80%</a:t>
+            </a:r>
+            <a:endParaRPr lang="en-US" sz="2600" dirty="0"/>
+          </a:p>
+        </p:txBody>
+      </p:sp>
+      <p:sp>
+        <p:nvSpPr>
+          <p:cNvPr id="12" name="Text 6"/>
+          <p:cNvSpPr/>
+          <p:nvPr/>
+        </p:nvSpPr>
+        <p:spPr>
+          <a:xfrm>
+            <a:off x="4448556" y="3977640"/>
+            <a:ext cx="3291840" cy="457200"/>
+          </a:xfrm>
+          <a:prstGeom prst="rect">
+            <a:avLst/>
+          </a:prstGeom>
+          <a:noFill/>
+          <a:ln/>
+        </p:spPr>
+        <p:txBody>
+          <a:bodyPr wrap="square" rtlCol="0" anchor="ctr"/>
+          <a:lstStyle/>
+          <a:p>
+            <a:pPr rtl="1" algn="ctr" indent="0" marL="0">
+              <a:buNone/>
+            </a:pPr>
+            <a:r>
+              <a:rPr lang="en-US" sz="1300" dirty="0">
+                <a:solidFill>
+                  <a:srgbClr val="1A1A1A"/>
+                </a:solidFill>
+                <a:latin typeface="Calibri" pitchFamily="34" charset="0"/>
+                <a:ea typeface="Calibri" pitchFamily="34" charset="-122"/>
+                <a:cs typeface="Calibri" pitchFamily="34" charset="-120"/>
+              </a:rPr>
+              <a:t>רווח גולמי</a:t>
+            </a:r>
+            <a:endParaRPr lang="en-US" sz="1300" dirty="0"/>
+          </a:p>
+        </p:txBody>
+      </p:sp>
+      <p:sp>
+        <p:nvSpPr>
+          <p:cNvPr id="13" name="Text 6"/>
+          <p:cNvSpPr/>
+          <p:nvPr/>
+        </p:nvSpPr>
+        <p:spPr>
+          <a:xfrm>
+            <a:off x="4448556" y="4389120"/>
+            <a:ext cx="3291840" cy="457200"/>
+          </a:xfrm>
+          <a:prstGeom prst="rect">
+            <a:avLst/>
+          </a:prstGeom>
+          <a:noFill/>
+          <a:ln/>
+        </p:spPr>
+        <p:txBody>
+          <a:bodyPr wrap="square" rtlCol="0" anchor="ctr"/>
+          <a:lstStyle/>
+          <a:p>
+            <a:pPr rtl="1" algn="ctr" indent="0" marL="0">
+              <a:buNone/>
+            </a:pPr>
+            <a:r>
+              <a:rPr lang="en-US" sz="1150" dirty="0">
+                <a:solidFill>
+                  <a:srgbClr val="6B6B6B"/>
+                </a:solidFill>
+                <a:latin typeface="Calibri" pitchFamily="34" charset="0"/>
+                <a:ea typeface="Calibri" pitchFamily="34" charset="-122"/>
+                <a:cs typeface="Calibri" pitchFamily="34" charset="-120"/>
+              </a:rPr>
+              <a:t>עלויות תפעול נמוכות לכל לקוח נוסף</a:t>
+            </a:r>
+            <a:endParaRPr lang="en-US" sz="1150" dirty="0"/>
+          </a:p>
+        </p:txBody>
+      </p:sp>
+      <p:sp>
+        <p:nvSpPr>
+          <p:cNvPr id="4" name="Shape 1"/>
+          <p:cNvSpPr/>
+          <p:nvPr/>
+        </p:nvSpPr>
+        <p:spPr>
+          <a:xfrm>
+            <a:off x="790956" y="2011680"/>
+            <a:ext cx="3291840" cy="3108960"/>
+          </a:xfrm>
+          <a:prstGeom prst="roundRect">
+            <a:avLst>
+              <a:gd name="adj" fmla="val 2353"/>
+            </a:avLst>
+          </a:prstGeom>
+          <a:solidFill>
+            <a:srgbClr val="EEE6FB"/>
+          </a:solidFill>
+          <a:ln/>
+        </p:spPr>
+      </p:sp>
+      <p:pic>
+        <p:nvPicPr>
+          <p:cNvPr id="5" name="Image 0" descr="preencoded.png">    </p:cNvPr>
+          <p:cNvPicPr>
+            <a:picLocks noChangeAspect="1"/>
+          </p:cNvPicPr>
+          <p:nvPr/>
+        </p:nvPicPr>
+        <p:blipFill>
+          <a:blip r:embed="rId2"/>
+          <a:stretch>
+            <a:fillRect/>
+          </a:stretch>
+        </p:blipFill>
+        <p:spPr>
+          <a:xfrm>
+            <a:off x="2116836" y="2377440"/>
+            <a:ext cx="640080" cy="640080"/>
+          </a:xfrm>
+          <a:prstGeom prst="rect">
+            <a:avLst/>
+          </a:prstGeom>
+        </p:spPr>
+      </p:pic>
+      <p:sp>
+        <p:nvSpPr>
+          <p:cNvPr id="6" name="Text 2"/>
+          <p:cNvSpPr/>
+          <p:nvPr/>
+        </p:nvSpPr>
+        <p:spPr>
+          <a:xfrm>
+            <a:off x="790956" y="3291840"/>
+            <a:ext cx="3291840" cy="640080"/>
+          </a:xfrm>
+          <a:prstGeom prst="rect">
+            <a:avLst/>
+          </a:prstGeom>
+          <a:noFill/>
+          <a:ln/>
+        </p:spPr>
+        <p:txBody>
+          <a:bodyPr wrap="square" rtlCol="0" anchor="ctr"/>
+          <a:lstStyle/>
+          <a:p>
+            <a:pPr algn="ctr" indent="0" marL="0">
+              <a:buNone/>
+            </a:pPr>
+            <a:r>
+              <a:rPr lang="en-US" sz="2600" b="1" dirty="0">
+                <a:solidFill>
+                  <a:srgbClr val="7C3AED"/>
+                </a:solidFill>
+              </a:rPr>
+              <a:t>₪1,800</a:t>
+            </a:r>
+            <a:endParaRPr lang="en-US" sz="2600" dirty="0"/>
+          </a:p>
+        </p:txBody>
+      </p:sp>
+      <p:sp>
+        <p:nvSpPr>
+          <p:cNvPr id="7" name="Text 3"/>
+          <p:cNvSpPr/>
+          <p:nvPr/>
+        </p:nvSpPr>
+        <p:spPr>
+          <a:xfrm>
+            <a:off x="790956" y="3977640"/>
+            <a:ext cx="3291840" cy="457200"/>
+          </a:xfrm>
+          <a:prstGeom prst="rect">
+            <a:avLst/>
+          </a:prstGeom>
+          <a:noFill/>
+          <a:ln/>
+        </p:spPr>
+        <p:txBody>
+          <a:bodyPr wrap="square" rtlCol="0" anchor="ctr"/>
+          <a:lstStyle/>
+          <a:p>
+            <a:pPr rtl="1" algn="ctr" indent="0" marL="0">
+              <a:buNone/>
+            </a:pPr>
+            <a:r>
+              <a:rPr lang="en-US" sz="1300" dirty="0">
+                <a:solidFill>
+                  <a:srgbClr val="1A1A1A"/>
+                </a:solidFill>
+                <a:latin typeface="Calibri" pitchFamily="34" charset="0"/>
+                <a:ea typeface="Calibri" pitchFamily="34" charset="-122"/>
+                <a:cs typeface="Calibri" pitchFamily="34" charset="-120"/>
+              </a:rPr>
+              <a:t>ערך לקוח לאורך זמן (LTV)</a:t>
+            </a:r>
+            <a:endParaRPr lang="en-US" sz="1300" dirty="0"/>
+          </a:p>
+        </p:txBody>
+      </p:sp>
+      <p:sp>
+        <p:nvSpPr>
+          <p:cNvPr id="8" name="Text 3"/>
+          <p:cNvSpPr/>
+          <p:nvPr/>
+        </p:nvSpPr>
+        <p:spPr>
+          <a:xfrm>
+            <a:off x="790956" y="4389120"/>
+            <a:ext cx="3291840" cy="457200"/>
+          </a:xfrm>
+          <a:prstGeom prst="rect">
+            <a:avLst/>
+          </a:prstGeom>
+          <a:noFill/>
+          <a:ln/>
+        </p:spPr>
+        <p:txBody>
+          <a:bodyPr wrap="square" rtlCol="0" anchor="ctr"/>
+          <a:lstStyle/>
+          <a:p>
+            <a:pPr rtl="1" algn="ctr" indent="0" marL="0">
+              <a:buNone/>
+            </a:pPr>
+            <a:r>
+              <a:rPr lang="en-US" sz="1150" dirty="0">
+                <a:solidFill>
+                  <a:srgbClr val="6B6B6B"/>
+                </a:solidFill>
+                <a:latin typeface="Calibri" pitchFamily="34" charset="0"/>
+                <a:ea typeface="Calibri" pitchFamily="34" charset="-122"/>
+                <a:cs typeface="Calibri" pitchFamily="34" charset="-120"/>
+              </a:rPr>
+              <a:t>לעומת עלות גיוס לקוח של כ-₪300</a:t>
+            </a:r>
+            <a:endParaRPr lang="en-US" sz="1150" dirty="0"/>
+          </a:p>
+        </p:txBody>
+      </p:sp>
+    </p:spTree>
+  </p:cSld>
+  <p:clrMapOvr>
+    <a:masterClrMapping/>
+  </p:clrMapOvr>
+</p:sld>
+</file>
+
+<file path=ppt/slides/slide7.xml><?xml version="1.0" encoding="utf-8"?>
+<p:sld xmlns:a="http://schemas.openxmlformats.org/drawingml/2006/main" xmlns:p="http://schemas.openxmlformats.org/presentationml/2006/main" xmlns:r="http://schemas.openxmlformats.org/officeDocument/2006/relationships">
+  <p:cSld>
+    <p:bg>
+      <p:bgPr>
+        <a:solidFill>
+          <a:srgbClr val="EEE6FB"/>
+        </a:solidFill>
+      </p:bgPr>
+    </p:bg>
+    <p:spTree>
+      <p:nvGrpSpPr>
+        <p:cNvPr id="2" name=""/>
+        <p:cNvGrpSpPr/>
+        <p:nvPr/>
+      </p:nvGrpSpPr>
+      <p:grpSpPr/>
+      <p:sp>
+        <p:nvSpPr>
+          <p:cNvPr id="3" name="Text 0"/>
+          <p:cNvSpPr/>
+          <p:nvPr/>
+        </p:nvSpPr>
+        <p:spPr>
+          <a:xfrm>
+            <a:off x="640080" y="548640"/>
+            <a:ext cx="10881360" cy="731520"/>
+          </a:xfrm>
+          <a:prstGeom prst="rect">
+            <a:avLst/>
+          </a:prstGeom>
+          <a:noFill/>
+          <a:ln/>
+        </p:spPr>
+        <p:txBody>
+          <a:bodyPr wrap="square" rtlCol="0" anchor="ctr"/>
+          <a:lstStyle/>
+          <a:p>
+            <a:pPr rtl="1" algn="ctr" indent="0" marL="0">
+              <a:buNone/>
+            </a:pPr>
+            <a:r>
+              <a:rPr lang="en-US" sz="3200" b="1" dirty="0">
+                <a:solidFill>
+                  <a:srgbClr val="7C3AED"/>
+                </a:solidFill>
+                <a:latin typeface="Calibri" pitchFamily="34" charset="0"/>
+                <a:ea typeface="Calibri" pitchFamily="34" charset="-122"/>
+                <a:cs typeface="Calibri" pitchFamily="34" charset="-120"/>
+              </a:rPr>
+              <a:t>תחרות: למה דווקא אנחנו</a:t>
+            </a:r>
+            <a:endParaRPr lang="en-US" sz="3200" dirty="0"/>
+          </a:p>
+        </p:txBody>
+      </p:sp>
+      <p:sp>
+        <p:nvSpPr>
+          <p:cNvPr id="4" name="Text 0"/>
+          <p:cNvSpPr/>
+          <p:nvPr/>
+        </p:nvSpPr>
+        <p:spPr>
+          <a:xfrm>
+            <a:off x="640080" y="1280160"/>
+            <a:ext cx="10881360" cy="457200"/>
+          </a:xfrm>
+          <a:prstGeom prst="rect">
+            <a:avLst/>
+          </a:prstGeom>
+          <a:noFill/>
+          <a:ln/>
+        </p:spPr>
+        <p:txBody>
+          <a:bodyPr wrap="square" rtlCol="0" anchor="ctr"/>
+          <a:lstStyle/>
+          <a:p>
+            <a:pPr rtl="1" algn="ctr" indent="0" marL="0">
+              <a:buNone/>
+            </a:pPr>
+            <a:r>
+              <a:rPr lang="en-US" sz="1500" b="0" dirty="0">
+                <a:solidFill>
+                  <a:srgbClr val="1A1A1A"/>
+                </a:solidFill>
+                <a:latin typeface="Calibri" pitchFamily="34" charset="0"/>
+                <a:ea typeface="Calibri" pitchFamily="34" charset="-122"/>
+                <a:cs typeface="Calibri" pitchFamily="34" charset="-120"/>
+              </a:rPr>
+              <a:t>המתחרים העיקריים: מתחרה א', מתחרה ב' ופתרונות ידניים כמו אקסל — וכך אנחנו מתבדלים</a:t>
+            </a:r>
+            <a:endParaRPr lang="en-US" sz="1500" dirty="0"/>
+          </a:p>
+        </p:txBody>
+      </p:sp>
+      <p:sp>
+        <p:nvSpPr>
+          <p:cNvPr id="5" name="Shape 7"/>
+          <p:cNvSpPr/>
+          <p:nvPr/>
+        </p:nvSpPr>
+        <p:spPr>
+          <a:xfrm>
+            <a:off x="8014716" y="2377440"/>
+            <a:ext cx="3108960" cy="2103120"/>
+          </a:xfrm>
+          <a:prstGeom prst="roundRect">
+            <a:avLst>
+              <a:gd name="adj" fmla="val 2609"/>
+            </a:avLst>
+          </a:prstGeom>
+          <a:solidFill>
+            <a:srgbClr val="FFFFFF"/>
+          </a:solidFill>
+          <a:ln/>
+        </p:spPr>
+      </p:sp>
+      <p:sp>
+        <p:nvSpPr>
+          <p:cNvPr id="6" name="Text 8"/>
+          <p:cNvSpPr/>
+          <p:nvPr/>
+        </p:nvSpPr>
+        <p:spPr>
+          <a:xfrm>
+            <a:off x="8014716" y="2697480"/>
+            <a:ext cx="3108960" cy="822960"/>
+          </a:xfrm>
+          <a:prstGeom prst="rect">
+            <a:avLst/>
+          </a:prstGeom>
+          <a:noFill/>
+          <a:ln/>
+        </p:spPr>
+        <p:txBody>
+          <a:bodyPr wrap="square" rtlCol="0" anchor="ctr"/>
+          <a:lstStyle/>
+          <a:p>
+            <a:pPr algn="ctr" indent="0" marL="0" rtl="1">
+              <a:buNone/>
+            </a:pPr>
+            <a:r>
+              <a:rPr lang="en-US" sz="3600" b="1" dirty="0">
+                <a:solidFill>
+                  <a:srgbClr val="7C3AED"/>
+                </a:solidFill>
+                <a:latin typeface="Calibri" pitchFamily="34" charset="0"/>
+                <a:ea typeface="Calibri" pitchFamily="34" charset="-122"/>
+                <a:cs typeface="Calibri" pitchFamily="34" charset="-120"/>
+              </a:rPr>
+              <a:t>פי 3</a:t>
+            </a:r>
+            <a:endParaRPr lang="en-US" sz="3600" dirty="0"/>
+          </a:p>
+        </p:txBody>
+      </p:sp>
+      <p:sp>
+        <p:nvSpPr>
+          <p:cNvPr id="7" name="Text 9"/>
+          <p:cNvSpPr/>
+          <p:nvPr/>
+        </p:nvSpPr>
+        <p:spPr>
+          <a:xfrm>
+            <a:off x="8014716" y="3611880"/>
+            <a:ext cx="3108960" cy="457200"/>
+          </a:xfrm>
+          <a:prstGeom prst="rect">
+            <a:avLst/>
+          </a:prstGeom>
+          <a:noFill/>
+          <a:ln/>
+        </p:spPr>
+        <p:txBody>
+          <a:bodyPr wrap="square" rtlCol="0" anchor="ctr"/>
+          <a:lstStyle/>
+          <a:p>
+            <a:pPr rtl="1" algn="ctr" indent="0" marL="0">
+              <a:buNone/>
+            </a:pPr>
+            <a:r>
+              <a:rPr lang="en-US" sz="1400" dirty="0">
+                <a:solidFill>
+                  <a:srgbClr val="1A1A1A"/>
+                </a:solidFill>
+                <a:latin typeface="Calibri" pitchFamily="34" charset="0"/>
+                <a:ea typeface="Calibri" pitchFamily="34" charset="-122"/>
+                <a:cs typeface="Calibri" pitchFamily="34" charset="-120"/>
+              </a:rPr>
+              <a:t>הטמעה מהירה יותר מהמתחרים</a:t>
+            </a:r>
+            <a:endParaRPr lang="en-US" sz="1400" dirty="0"/>
+          </a:p>
+        </p:txBody>
+      </p:sp>
+      <p:sp>
+        <p:nvSpPr>
+          <p:cNvPr id="8" name="Shape 4"/>
+          <p:cNvSpPr/>
+          <p:nvPr/>
+        </p:nvSpPr>
+        <p:spPr>
+          <a:xfrm>
+            <a:off x="4539996" y="2377440"/>
+            <a:ext cx="3108960" cy="2103120"/>
+          </a:xfrm>
+          <a:prstGeom prst="roundRect">
+            <a:avLst>
+              <a:gd name="adj" fmla="val 2609"/>
+            </a:avLst>
+          </a:prstGeom>
+          <a:solidFill>
+            <a:srgbClr val="FFFFFF"/>
+          </a:solidFill>
+          <a:ln/>
+        </p:spPr>
+      </p:sp>
+      <p:sp>
+        <p:nvSpPr>
+          <p:cNvPr id="9" name="Text 5"/>
+          <p:cNvSpPr/>
+          <p:nvPr/>
+        </p:nvSpPr>
+        <p:spPr>
+          <a:xfrm>
+            <a:off x="4539996" y="2697480"/>
+            <a:ext cx="3108960" cy="822960"/>
+          </a:xfrm>
+          <a:prstGeom prst="rect">
+            <a:avLst/>
+          </a:prstGeom>
+          <a:noFill/>
+          <a:ln/>
+        </p:spPr>
+        <p:txBody>
+          <a:bodyPr wrap="square" rtlCol="0" anchor="ctr"/>
+          <a:lstStyle/>
+          <a:p>
+            <a:pPr algn="ctr" indent="0" marL="0">
+              <a:buNone/>
+            </a:pPr>
+            <a:r>
+              <a:rPr lang="en-US" sz="3600" b="1" dirty="0">
+                <a:solidFill>
+                  <a:srgbClr val="7C3AED"/>
+                </a:solidFill>
+              </a:rPr>
+              <a:t>-50%</a:t>
+            </a:r>
+            <a:endParaRPr lang="en-US" sz="3600" dirty="0"/>
+          </a:p>
+        </p:txBody>
+      </p:sp>
+      <p:sp>
+        <p:nvSpPr>
+          <p:cNvPr id="10" name="Text 6"/>
+          <p:cNvSpPr/>
+          <p:nvPr/>
+        </p:nvSpPr>
+        <p:spPr>
+          <a:xfrm>
+            <a:off x="4539996" y="3611880"/>
+            <a:ext cx="3108960" cy="457200"/>
+          </a:xfrm>
+          <a:prstGeom prst="rect">
+            <a:avLst/>
+          </a:prstGeom>
+          <a:noFill/>
+          <a:ln/>
+        </p:spPr>
+        <p:txBody>
+          <a:bodyPr wrap="square" rtlCol="0" anchor="ctr"/>
+          <a:lstStyle/>
+          <a:p>
+            <a:pPr rtl="1" algn="ctr" indent="0" marL="0">
+              <a:buNone/>
+            </a:pPr>
+            <a:r>
+              <a:rPr lang="en-US" sz="1400" dirty="0">
+                <a:solidFill>
+                  <a:srgbClr val="1A1A1A"/>
+                </a:solidFill>
+                <a:latin typeface="Calibri" pitchFamily="34" charset="0"/>
+                <a:ea typeface="Calibri" pitchFamily="34" charset="-122"/>
+                <a:cs typeface="Calibri" pitchFamily="34" charset="-120"/>
+              </a:rPr>
+              <a:t>עלות לעומת החלופות הקיימות</a:t>
+            </a:r>
+            <a:endParaRPr lang="en-US" sz="1400" dirty="0"/>
+          </a:p>
+        </p:txBody>
+      </p:sp>
+      <p:sp>
+        <p:nvSpPr>
+          <p:cNvPr id="11" name="Shape 1"/>
+          <p:cNvSpPr/>
+          <p:nvPr/>
+        </p:nvSpPr>
+        <p:spPr>
+          <a:xfrm>
+            <a:off x="1065276" y="2377440"/>
+            <a:ext cx="3108960" cy="2103120"/>
+          </a:xfrm>
+          <a:prstGeom prst="roundRect">
+            <a:avLst>
+              <a:gd name="adj" fmla="val 2609"/>
+            </a:avLst>
+          </a:prstGeom>
+          <a:solidFill>
+            <a:srgbClr val="FFFFFF"/>
+          </a:solidFill>
+          <a:ln/>
+        </p:spPr>
+      </p:sp>
+      <p:sp>
+        <p:nvSpPr>
+          <p:cNvPr id="12" name="Text 2"/>
+          <p:cNvSpPr/>
+          <p:nvPr/>
+        </p:nvSpPr>
+        <p:spPr>
+          <a:xfrm>
+            <a:off x="1065276" y="2697480"/>
+            <a:ext cx="3108960" cy="822960"/>
+          </a:xfrm>
+          <a:prstGeom prst="rect">
+            <a:avLst/>
+          </a:prstGeom>
+          <a:noFill/>
+          <a:ln/>
+        </p:spPr>
+        <p:txBody>
+          <a:bodyPr wrap="square" rtlCol="0" anchor="ctr"/>
+          <a:lstStyle/>
+          <a:p>
+            <a:pPr algn="ctr" indent="0" marL="0">
+              <a:buNone/>
+            </a:pPr>
+            <a:r>
+              <a:rPr lang="en-US" sz="3600" b="1" dirty="0">
+                <a:solidFill>
+                  <a:srgbClr val="7C3AED"/>
+                </a:solidFill>
+              </a:rPr>
+              <a:t>100%</a:t>
+            </a:r>
+            <a:endParaRPr lang="en-US" sz="3600" dirty="0"/>
+          </a:p>
+        </p:txBody>
+      </p:sp>
+      <p:sp>
+        <p:nvSpPr>
+          <p:cNvPr id="13" name="Text 3"/>
+          <p:cNvSpPr/>
+          <p:nvPr/>
+        </p:nvSpPr>
+        <p:spPr>
+          <a:xfrm>
+            <a:off x="1065276" y="3611880"/>
+            <a:ext cx="3108960" cy="457200"/>
+          </a:xfrm>
+          <a:prstGeom prst="rect">
+            <a:avLst/>
+          </a:prstGeom>
+          <a:noFill/>
+          <a:ln/>
+        </p:spPr>
+        <p:txBody>
+          <a:bodyPr wrap="square" rtlCol="0" anchor="ctr"/>
+          <a:lstStyle/>
+          <a:p>
+            <a:pPr rtl="1" algn="ctr" indent="0" marL="0">
+              <a:buNone/>
+            </a:pPr>
+            <a:r>
+              <a:rPr lang="en-US" sz="1400" dirty="0">
+                <a:solidFill>
+                  <a:srgbClr val="1A1A1A"/>
+                </a:solidFill>
+                <a:latin typeface="Calibri" pitchFamily="34" charset="0"/>
+                <a:ea typeface="Calibri" pitchFamily="34" charset="-122"/>
+                <a:cs typeface="Calibri" pitchFamily="34" charset="-120"/>
+              </a:rPr>
+              <a:t>בעברית ומותאם לשוק המקומי</a:t>
+            </a:r>
+            <a:endParaRPr lang="en-US" sz="1400" dirty="0"/>
+          </a:p>
+        </p:txBody>
+      </p:sp>
+    </p:spTree>
+  </p:cSld>
+  <p:clrMapOvr>
+    <a:masterClrMapping/>
+  </p:clrMapOvr>
+</p:sld>
+</file>
+
+<file path=ppt/slides/slide8.xml><?xml version="1.0" encoding="utf-8"?>
+<p:sld xmlns:a="http://schemas.openxmlformats.org/drawingml/2006/main" xmlns:p="http://schemas.openxmlformats.org/presentationml/2006/main" xmlns:r="http://schemas.openxmlformats.org/officeDocument/2006/relationships">
+  <p:cSld>
+    <p:bg>
+      <p:bgPr>
+        <a:solidFill>
+          <a:srgbClr val="FFFFFF"/>
+        </a:solidFill>
+      </p:bgPr>
+    </p:bg>
+    <p:spTree>
+      <p:nvGrpSpPr>
+        <p:cNvPr id="2" name=""/>
+        <p:cNvGrpSpPr/>
+        <p:nvPr/>
+      </p:nvGrpSpPr>
+      <p:grpSpPr/>
+      <p:sp>
+        <p:nvSpPr>
+          <p:cNvPr id="3" name="Text 0"/>
+          <p:cNvSpPr/>
+          <p:nvPr/>
+        </p:nvSpPr>
+        <p:spPr>
+          <a:xfrm>
+            <a:off x="640080" y="548640"/>
+            <a:ext cx="10881360" cy="731520"/>
+          </a:xfrm>
+          <a:prstGeom prst="rect">
+            <a:avLst/>
+          </a:prstGeom>
+          <a:noFill/>
+          <a:ln/>
+        </p:spPr>
+        <p:txBody>
+          <a:bodyPr wrap="square" rtlCol="0" anchor="ctr"/>
+          <a:lstStyle/>
+          <a:p>
+            <a:pPr rtl="1" algn="r" indent="0" marL="0">
+              <a:buNone/>
+            </a:pPr>
+            <a:r>
+              <a:rPr lang="en-US" sz="3200" b="1" dirty="0">
+                <a:solidFill>
+                  <a:srgbClr val="7C3AED"/>
+                </a:solidFill>
+                <a:latin typeface="Calibri" pitchFamily="34" charset="0"/>
+                <a:ea typeface="Calibri" pitchFamily="34" charset="-122"/>
+                <a:cs typeface="Calibri" pitchFamily="34" charset="-120"/>
+              </a:rPr>
+              <a:t>הצוות</a:t>
+            </a:r>
+            <a:endParaRPr lang="en-US" sz="3200" dirty="0"/>
+          </a:p>
+        </p:txBody>
+      </p:sp>
+      <p:sp>
+        <p:nvSpPr>
+          <p:cNvPr id="14" name="Shape 7"/>
+          <p:cNvSpPr/>
+          <p:nvPr/>
+        </p:nvSpPr>
+        <p:spPr>
+          <a:xfrm>
+            <a:off x="8106156" y="2011680"/>
+            <a:ext cx="3291840" cy="3108960"/>
+          </a:xfrm>
+          <a:prstGeom prst="roundRect">
+            <a:avLst>
+              <a:gd name="adj" fmla="val 2353"/>
+            </a:avLst>
+          </a:prstGeom>
+          <a:solidFill>
+            <a:srgbClr val="EEE6FB"/>
+          </a:solidFill>
+          <a:ln/>
+        </p:spPr>
+      </p:sp>
+      <p:pic>
+        <p:nvPicPr>
+          <p:cNvPr id="15" name="Image 2" descr="preencoded.png">    </p:cNvPr>
+          <p:cNvPicPr>
+            <a:picLocks noChangeAspect="1"/>
+          </p:cNvPicPr>
+          <p:nvPr/>
+        </p:nvPicPr>
+        <p:blipFill>
+          <a:blip r:embed="rId2"/>
+          <a:stretch>
+            <a:fillRect/>
+          </a:stretch>
+        </p:blipFill>
+        <p:spPr>
+          <a:xfrm>
+            <a:off x="9432036" y="2377440"/>
+            <a:ext cx="640080" cy="640080"/>
+          </a:xfrm>
+          <a:prstGeom prst="rect">
+            <a:avLst/>
+          </a:prstGeom>
+        </p:spPr>
+      </p:pic>
+      <p:sp>
+        <p:nvSpPr>
+          <p:cNvPr id="16" name="Text 8"/>
+          <p:cNvSpPr/>
+          <p:nvPr/>
+        </p:nvSpPr>
+        <p:spPr>
+          <a:xfrm>
+            <a:off x="8106156" y="3291840"/>
+            <a:ext cx="3291840" cy="640080"/>
+          </a:xfrm>
+          <a:prstGeom prst="rect">
+            <a:avLst/>
+          </a:prstGeom>
+          <a:noFill/>
+          <a:ln/>
+        </p:spPr>
+        <p:txBody>
+          <a:bodyPr wrap="square" rtlCol="0" anchor="ctr"/>
+          <a:lstStyle/>
+          <a:p>
+            <a:pPr algn="ctr" indent="0" marL="0" rtl="1">
+              <a:buNone/>
+            </a:pPr>
+            <a:r>
+              <a:rPr lang="en-US" sz="2000" b="1" dirty="0">
+                <a:solidFill>
+                  <a:srgbClr val="1A1A1A"/>
+                </a:solidFill>
+                <a:latin typeface="Calibri" pitchFamily="34" charset="0"/>
+                <a:ea typeface="Calibri" pitchFamily="34" charset="-122"/>
+                <a:cs typeface="Calibri" pitchFamily="34" charset="-120"/>
+              </a:rPr>
+              <a:t>שם פרטי ומשפחה</a:t>
+            </a:r>
+            <a:endParaRPr lang="en-US" sz="2000" dirty="0"/>
+          </a:p>
+        </p:txBody>
+      </p:sp>
+      <p:sp>
+        <p:nvSpPr>
+          <p:cNvPr id="17" name="Text 9"/>
+          <p:cNvSpPr/>
+          <p:nvPr/>
+        </p:nvSpPr>
+        <p:spPr>
+          <a:xfrm>
+            <a:off x="8106156" y="3977640"/>
+            <a:ext cx="3291840" cy="457200"/>
+          </a:xfrm>
+          <a:prstGeom prst="rect">
+            <a:avLst/>
+          </a:prstGeom>
+          <a:noFill/>
+          <a:ln/>
+        </p:spPr>
+        <p:txBody>
+          <a:bodyPr wrap="square" rtlCol="0" anchor="ctr"/>
+          <a:lstStyle/>
+          <a:p>
+            <a:pPr rtl="1" algn="ctr" indent="0" marL="0">
+              <a:buNone/>
+            </a:pPr>
+            <a:r>
+              <a:rPr lang="en-US" sz="1300" dirty="0" b="1">
+                <a:solidFill>
+                  <a:srgbClr val="7C3AED"/>
+                </a:solidFill>
+                <a:latin typeface="Calibri" pitchFamily="34" charset="0"/>
+                <a:ea typeface="Calibri" pitchFamily="34" charset="-122"/>
+                <a:cs typeface="Calibri" pitchFamily="34" charset="-120"/>
+              </a:rPr>
+              <a:t>מנכ"ל ומייסד</a:t>
+            </a:r>
+            <a:endParaRPr lang="en-US" sz="1300" dirty="0"/>
+          </a:p>
+        </p:txBody>
+      </p:sp>
+      <p:sp>
+        <p:nvSpPr>
+          <p:cNvPr id="18" name="Text 9"/>
+          <p:cNvSpPr/>
+          <p:nvPr/>
+        </p:nvSpPr>
+        <p:spPr>
+          <a:xfrm>
+            <a:off x="8106156" y="4389120"/>
+            <a:ext cx="3291840" cy="457200"/>
+          </a:xfrm>
+          <a:prstGeom prst="rect">
+            <a:avLst/>
+          </a:prstGeom>
+          <a:noFill/>
+          <a:ln/>
+        </p:spPr>
+        <p:txBody>
+          <a:bodyPr wrap="square" rtlCol="0" anchor="ctr"/>
+          <a:lstStyle/>
+          <a:p>
+            <a:pPr rtl="1" algn="ctr" indent="0" marL="0">
+              <a:buNone/>
+            </a:pPr>
+            <a:r>
+              <a:rPr lang="en-US" sz="1150" dirty="0" b="1">
+                <a:solidFill>
+                  <a:srgbClr val="6B6B6B"/>
+                </a:solidFill>
+                <a:latin typeface="Calibri" pitchFamily="34" charset="0"/>
+                <a:ea typeface="Calibri" pitchFamily="34" charset="-122"/>
+                <a:cs typeface="Calibri" pitchFamily="34" charset="-120"/>
+              </a:rPr>
+              <a:t>10 שנות ניסיון בניהול מוצר ומכירות</a:t>
+            </a:r>
+            <a:endParaRPr lang="en-US" sz="1150" dirty="0"/>
+          </a:p>
+        </p:txBody>
+      </p:sp>
+      <p:sp>
+        <p:nvSpPr>
+          <p:cNvPr id="9" name="Shape 4"/>
+          <p:cNvSpPr/>
+          <p:nvPr/>
+        </p:nvSpPr>
+        <p:spPr>
+          <a:xfrm>
+            <a:off x="4448556" y="2011680"/>
+            <a:ext cx="3291840" cy="3108960"/>
+          </a:xfrm>
+          <a:prstGeom prst="roundRect">
+            <a:avLst>
+              <a:gd name="adj" fmla="val 2353"/>
+            </a:avLst>
+          </a:prstGeom>
+          <a:solidFill>
+            <a:srgbClr val="EEE6FB"/>
+          </a:solidFill>
+          <a:ln/>
+        </p:spPr>
+      </p:sp>
+      <p:pic>
+        <p:nvPicPr>
+          <p:cNvPr id="10" name="Image 1" descr="preencoded.png">    </p:cNvPr>
+          <p:cNvPicPr>
+            <a:picLocks noChangeAspect="1"/>
+          </p:cNvPicPr>
+          <p:nvPr/>
+        </p:nvPicPr>
+        <p:blipFill>
+          <a:blip r:embed="rId2"/>
+          <a:stretch>
+            <a:fillRect/>
+          </a:stretch>
+        </p:blipFill>
+        <p:spPr>
+          <a:xfrm>
+            <a:off x="5774436" y="2377440"/>
+            <a:ext cx="640080" cy="640080"/>
+          </a:xfrm>
+          <a:prstGeom prst="rect">
+            <a:avLst/>
+          </a:prstGeom>
+        </p:spPr>
+      </p:pic>
+      <p:sp>
+        <p:nvSpPr>
+          <p:cNvPr id="11" name="Text 5"/>
+          <p:cNvSpPr/>
+          <p:nvPr/>
+        </p:nvSpPr>
+        <p:spPr>
+          <a:xfrm>
+            <a:off x="4448556" y="3291840"/>
+            <a:ext cx="3291840" cy="640080"/>
+          </a:xfrm>
+          <a:prstGeom prst="rect">
+            <a:avLst/>
+          </a:prstGeom>
+          <a:noFill/>
+          <a:ln/>
+        </p:spPr>
+        <p:txBody>
+          <a:bodyPr wrap="square" rtlCol="0" anchor="ctr"/>
+          <a:lstStyle/>
+          <a:p>
+            <a:pPr algn="ctr" indent="0" marL="0" rtl="1">
+              <a:buNone/>
+            </a:pPr>
+            <a:r>
+              <a:rPr lang="en-US" sz="2000" b="1" dirty="0">
+                <a:solidFill>
+                  <a:srgbClr val="1A1A1A"/>
+                </a:solidFill>
+                <a:latin typeface="Calibri" pitchFamily="34" charset="0"/>
+                <a:ea typeface="Calibri" pitchFamily="34" charset="-122"/>
+                <a:cs typeface="Calibri" pitchFamily="34" charset="-120"/>
+              </a:rPr>
+              <a:t>שם פרטי ומשפחה</a:t>
+            </a:r>
+            <a:endParaRPr lang="en-US" sz="2000" dirty="0"/>
+          </a:p>
+        </p:txBody>
+      </p:sp>
+      <p:sp>
+        <p:nvSpPr>
+          <p:cNvPr id="12" name="Text 6"/>
+          <p:cNvSpPr/>
+          <p:nvPr/>
+        </p:nvSpPr>
+        <p:spPr>
+          <a:xfrm>
+            <a:off x="4448556" y="3977640"/>
+            <a:ext cx="3291840" cy="457200"/>
+          </a:xfrm>
+          <a:prstGeom prst="rect">
+            <a:avLst/>
+          </a:prstGeom>
+          <a:noFill/>
+          <a:ln/>
+        </p:spPr>
+        <p:txBody>
+          <a:bodyPr wrap="square" rtlCol="0" anchor="ctr"/>
+          <a:lstStyle/>
+          <a:p>
+            <a:pPr rtl="1" algn="ctr" indent="0" marL="0">
+              <a:buNone/>
+            </a:pPr>
+            <a:r>
+              <a:rPr lang="en-US" sz="1300" dirty="0" b="1">
+                <a:solidFill>
+                  <a:srgbClr val="7C3AED"/>
+                </a:solidFill>
+                <a:latin typeface="Calibri" pitchFamily="34" charset="0"/>
+                <a:ea typeface="Calibri" pitchFamily="34" charset="-122"/>
+                <a:cs typeface="Calibri" pitchFamily="34" charset="-120"/>
+              </a:rPr>
+              <a:t>סמנכ"לית טכנולוגיה (CTO)</a:t>
+            </a:r>
+            <a:endParaRPr lang="en-US" sz="1300" dirty="0"/>
+          </a:p>
+        </p:txBody>
+      </p:sp>
+      <p:sp>
+        <p:nvSpPr>
+          <p:cNvPr id="13" name="Text 6"/>
+          <p:cNvSpPr/>
+          <p:nvPr/>
+        </p:nvSpPr>
+        <p:spPr>
+          <a:xfrm>
+            <a:off x="4448556" y="4389120"/>
+            <a:ext cx="3291840" cy="457200"/>
+          </a:xfrm>
+          <a:prstGeom prst="rect">
+            <a:avLst/>
+          </a:prstGeom>
+          <a:noFill/>
+          <a:ln/>
+        </p:spPr>
+        <p:txBody>
+          <a:bodyPr wrap="square" rtlCol="0" anchor="ctr"/>
+          <a:lstStyle/>
+          <a:p>
+            <a:pPr rtl="1" algn="ctr" indent="0" marL="0">
+              <a:buNone/>
+            </a:pPr>
+            <a:r>
+              <a:rPr lang="en-US" sz="1150" dirty="0" b="1">
+                <a:solidFill>
+                  <a:srgbClr val="6B6B6B"/>
+                </a:solidFill>
+                <a:latin typeface="Calibri" pitchFamily="34" charset="0"/>
+                <a:ea typeface="Calibri" pitchFamily="34" charset="-122"/>
+                <a:cs typeface="Calibri" pitchFamily="34" charset="-120"/>
+              </a:rPr>
+              <a:t>לשעבר ראש צוות פיתוח בחברת הייטק</a:t>
+            </a:r>
+            <a:endParaRPr lang="en-US" sz="1150" dirty="0"/>
+          </a:p>
+        </p:txBody>
+      </p:sp>
+      <p:sp>
+        <p:nvSpPr>
+          <p:cNvPr id="4" name="Shape 1"/>
+          <p:cNvSpPr/>
+          <p:nvPr/>
+        </p:nvSpPr>
+        <p:spPr>
+          <a:xfrm>
+            <a:off x="790956" y="2011680"/>
+            <a:ext cx="3291840" cy="3108960"/>
+          </a:xfrm>
+          <a:prstGeom prst="roundRect">
+            <a:avLst>
+              <a:gd name="adj" fmla="val 2353"/>
+            </a:avLst>
+          </a:prstGeom>
+          <a:solidFill>
+            <a:srgbClr val="EEE6FB"/>
+          </a:solidFill>
+          <a:ln/>
+        </p:spPr>
+      </p:sp>
+      <p:pic>
+        <p:nvPicPr>
+          <p:cNvPr id="5" name="Image 0" descr="preencoded.png">    </p:cNvPr>
+          <p:cNvPicPr>
+            <a:picLocks noChangeAspect="1"/>
+          </p:cNvPicPr>
+          <p:nvPr/>
+        </p:nvPicPr>
+        <p:blipFill>
+          <a:blip r:embed="rId2"/>
+          <a:stretch>
+            <a:fillRect/>
+          </a:stretch>
+        </p:blipFill>
+        <p:spPr>
+          <a:xfrm>
+            <a:off x="2116836" y="2377440"/>
+            <a:ext cx="640080" cy="640080"/>
+          </a:xfrm>
+          <a:prstGeom prst="rect">
+            <a:avLst/>
+          </a:prstGeom>
+        </p:spPr>
+      </p:pic>
+      <p:sp>
+        <p:nvSpPr>
+          <p:cNvPr id="6" name="Text 2"/>
+          <p:cNvSpPr/>
+          <p:nvPr/>
+        </p:nvSpPr>
+        <p:spPr>
+          <a:xfrm>
+            <a:off x="790956" y="3291840"/>
+            <a:ext cx="3291840" cy="640080"/>
+          </a:xfrm>
+          <a:prstGeom prst="rect">
+            <a:avLst/>
+          </a:prstGeom>
+          <a:noFill/>
+          <a:ln/>
+        </p:spPr>
+        <p:txBody>
+          <a:bodyPr wrap="square" rtlCol="0" anchor="ctr"/>
+          <a:lstStyle/>
+          <a:p>
+            <a:pPr algn="ctr" indent="0" marL="0" rtl="1">
+              <a:buNone/>
+            </a:pPr>
+            <a:r>
+              <a:rPr lang="en-US" sz="2000" b="1" dirty="0">
+                <a:solidFill>
+                  <a:srgbClr val="1A1A1A"/>
+                </a:solidFill>
+                <a:latin typeface="Calibri" pitchFamily="34" charset="0"/>
+                <a:ea typeface="Calibri" pitchFamily="34" charset="-122"/>
+                <a:cs typeface="Calibri" pitchFamily="34" charset="-120"/>
+              </a:rPr>
+              <a:t>שם פרטי ומשפחה</a:t>
+            </a:r>
+            <a:endParaRPr lang="en-US" sz="2000" dirty="0"/>
+          </a:p>
+        </p:txBody>
+      </p:sp>
+      <p:sp>
+        <p:nvSpPr>
+          <p:cNvPr id="7" name="Text 3"/>
+          <p:cNvSpPr/>
+          <p:nvPr/>
+        </p:nvSpPr>
+        <p:spPr>
+          <a:xfrm>
+            <a:off x="790956" y="3977640"/>
+            <a:ext cx="3291840" cy="457200"/>
+          </a:xfrm>
+          <a:prstGeom prst="rect">
+            <a:avLst/>
+          </a:prstGeom>
+          <a:noFill/>
+          <a:ln/>
+        </p:spPr>
+        <p:txBody>
+          <a:bodyPr wrap="square" rtlCol="0" anchor="ctr"/>
+          <a:lstStyle/>
+          <a:p>
+            <a:pPr rtl="1" algn="ctr" indent="0" marL="0">
+              <a:buNone/>
+            </a:pPr>
+            <a:r>
+              <a:rPr lang="en-US" sz="1300" dirty="0" b="1">
+                <a:solidFill>
+                  <a:srgbClr val="7C3AED"/>
+                </a:solidFill>
+                <a:latin typeface="Calibri" pitchFamily="34" charset="0"/>
+                <a:ea typeface="Calibri" pitchFamily="34" charset="-122"/>
+                <a:cs typeface="Calibri" pitchFamily="34" charset="-120"/>
+              </a:rPr>
+              <a:t>סמנכ"ל שיווק ומכירות</a:t>
+            </a:r>
+            <a:endParaRPr lang="en-US" sz="1300" dirty="0"/>
+          </a:p>
+        </p:txBody>
+      </p:sp>
+      <p:sp>
+        <p:nvSpPr>
+          <p:cNvPr id="8" name="Text 3"/>
+          <p:cNvSpPr/>
+          <p:nvPr/>
+        </p:nvSpPr>
+        <p:spPr>
+          <a:xfrm>
+            <a:off x="790956" y="4389120"/>
+            <a:ext cx="3291840" cy="457200"/>
+          </a:xfrm>
+          <a:prstGeom prst="rect">
+            <a:avLst/>
+          </a:prstGeom>
+          <a:noFill/>
+          <a:ln/>
+        </p:spPr>
+        <p:txBody>
+          <a:bodyPr wrap="square" rtlCol="0" anchor="ctr"/>
+          <a:lstStyle/>
+          <a:p>
+            <a:pPr rtl="1" algn="ctr" indent="0" marL="0">
+              <a:buNone/>
+            </a:pPr>
+            <a:r>
+              <a:rPr lang="en-US" sz="1150" dirty="0" b="1">
+                <a:solidFill>
+                  <a:srgbClr val="6B6B6B"/>
+                </a:solidFill>
+                <a:latin typeface="Calibri" pitchFamily="34" charset="0"/>
+                <a:ea typeface="Calibri" pitchFamily="34" charset="-122"/>
+                <a:cs typeface="Calibri" pitchFamily="34" charset="-120"/>
+              </a:rPr>
+              <a:t>הוביל צמיחה של פי 4 בחברה הקודמת</a:t>
+            </a:r>
+            <a:endParaRPr lang="en-US" sz="1150" dirty="0"/>
+          </a:p>
+        </p:txBody>
+      </p:sp>
+    </p:spTree>
+  </p:cSld>
+  <p:clrMapOvr>
+    <a:masterClrMapping/>
+  </p:clrMapOvr>
+</p:sld>
+</file>
+
+<file path=ppt/slides/slide9.xml><?xml version="1.0" encoding="utf-8"?>
+<p:sld xmlns:a="http://schemas.openxmlformats.org/drawingml/2006/main" xmlns:p="http://schemas.openxmlformats.org/presentationml/2006/main" xmlns:r="http://schemas.openxmlformats.org/officeDocument/2006/relationships">
+  <p:cSld>
+    <p:bg>
+      <p:bgPr>
+        <a:solidFill>
+          <a:srgbClr val="EEE6FB"/>
+        </a:solidFill>
+      </p:bgPr>
+    </p:bg>
+    <p:spTree>
+      <p:nvGrpSpPr>
+        <p:cNvPr id="2" name=""/>
+        <p:cNvGrpSpPr/>
+        <p:nvPr/>
+      </p:nvGrpSpPr>
+      <p:grpSpPr/>
+      <p:sp>
+        <p:nvSpPr>
+          <p:cNvPr id="3" name="Text 0"/>
+          <p:cNvSpPr/>
+          <p:nvPr/>
+        </p:nvSpPr>
+        <p:spPr>
+          <a:xfrm>
+            <a:off x="640080" y="548640"/>
+            <a:ext cx="10881360" cy="731520"/>
+          </a:xfrm>
+          <a:prstGeom prst="rect">
+            <a:avLst/>
+          </a:prstGeom>
+          <a:noFill/>
+          <a:ln/>
+        </p:spPr>
+        <p:txBody>
+          <a:bodyPr wrap="square" rtlCol="0" anchor="ctr"/>
+          <a:lstStyle/>
+          <a:p>
+            <a:pPr rtl="1" algn="ctr" indent="0" marL="0">
+              <a:buNone/>
+            </a:pPr>
+            <a:r>
+              <a:rPr lang="en-US" sz="3200" b="1" dirty="0">
+                <a:solidFill>
+                  <a:srgbClr val="7C3AED"/>
+                </a:solidFill>
+                <a:latin typeface="Calibri" pitchFamily="34" charset="0"/>
+                <a:ea typeface="Calibri" pitchFamily="34" charset="-122"/>
+                <a:cs typeface="Calibri" pitchFamily="34" charset="-120"/>
+              </a:rPr>
+              <a:t>שימוש בכספי הגיוס</a:t>
+            </a:r>
+            <a:endParaRPr lang="en-US" sz="3200" dirty="0"/>
+          </a:p>
+        </p:txBody>
+      </p:sp>
+      <p:sp>
+        <p:nvSpPr>
+          <p:cNvPr id="4" name="Text 0"/>
+          <p:cNvSpPr/>
+          <p:nvPr/>
+        </p:nvSpPr>
+        <p:spPr>
+          <a:xfrm>
+            <a:off x="640080" y="1280160"/>
+            <a:ext cx="10881360" cy="457200"/>
+          </a:xfrm>
+          <a:prstGeom prst="rect">
+            <a:avLst/>
+          </a:prstGeom>
+          <a:noFill/>
+          <a:ln/>
+        </p:spPr>
+        <p:txBody>
+          <a:bodyPr wrap="square" rtlCol="0" anchor="ctr"/>
+          <a:lstStyle/>
+          <a:p>
+            <a:pPr rtl="1" algn="ctr" indent="0" marL="0">
+              <a:buNone/>
+            </a:pPr>
+            <a:r>
+              <a:rPr lang="en-US" sz="1500" b="0" dirty="0">
+                <a:solidFill>
+                  <a:srgbClr val="1A1A1A"/>
+                </a:solidFill>
+                <a:latin typeface="Calibri" pitchFamily="34" charset="0"/>
+                <a:ea typeface="Calibri" pitchFamily="34" charset="-122"/>
+                <a:cs typeface="Calibri" pitchFamily="34" charset="-120"/>
+              </a:rPr>
+              <a:t>כך נשתמש ב-$1.5M במהלך 18 החודשים הקרובים</a:t>
+            </a:r>
+            <a:endParaRPr lang="en-US" sz="1500" dirty="0"/>
+          </a:p>
+        </p:txBody>
+      </p:sp>
+      <p:sp>
+        <p:nvSpPr>
+          <p:cNvPr id="5" name="Shape 7"/>
+          <p:cNvSpPr/>
+          <p:nvPr/>
+        </p:nvSpPr>
+        <p:spPr>
+          <a:xfrm>
+            <a:off x="8014716" y="1965960"/>
+            <a:ext cx="3108960" cy="2514600"/>
+          </a:xfrm>
+          <a:prstGeom prst="roundRect">
+            <a:avLst>
+              <a:gd name="adj" fmla="val 2609"/>
+            </a:avLst>
+          </a:prstGeom>
+          <a:solidFill>
+            <a:srgbClr val="FFFFFF"/>
+          </a:solidFill>
+          <a:ln/>
+        </p:spPr>
+      </p:sp>
+      <p:sp>
+        <p:nvSpPr>
+          <p:cNvPr id="6" name="Text 8"/>
+          <p:cNvSpPr/>
+          <p:nvPr/>
+        </p:nvSpPr>
+        <p:spPr>
+          <a:xfrm>
+            <a:off x="8014716" y="2194560"/>
+            <a:ext cx="3108960" cy="822960"/>
+          </a:xfrm>
+          <a:prstGeom prst="rect">
+            <a:avLst/>
+          </a:prstGeom>
+          <a:noFill/>
+          <a:ln/>
+        </p:spPr>
+        <p:txBody>
+          <a:bodyPr wrap="square" rtlCol="0" anchor="ctr"/>
+          <a:lstStyle/>
+          <a:p>
+            <a:pPr algn="ctr" indent="0" marL="0">
+              <a:buNone/>
+            </a:pPr>
+            <a:r>
+              <a:rPr lang="en-US" sz="3600" b="1" dirty="0">
+                <a:solidFill>
+                  <a:srgbClr val="7C3AED"/>
+                </a:solidFill>
+              </a:rPr>
+              <a:t>40%</a:t>
+            </a:r>
+            <a:endParaRPr lang="en-US" sz="3600" dirty="0"/>
+          </a:p>
+        </p:txBody>
+      </p:sp>
+      <p:sp>
+        <p:nvSpPr>
+          <p:cNvPr id="7" name="Text 9"/>
+          <p:cNvSpPr/>
+          <p:nvPr/>
+        </p:nvSpPr>
+        <p:spPr>
+          <a:xfrm>
+            <a:off x="8014716" y="3108960"/>
+            <a:ext cx="3108960" cy="457200"/>
+          </a:xfrm>
+          <a:prstGeom prst="rect">
+            <a:avLst/>
+          </a:prstGeom>
+          <a:noFill/>
+          <a:ln/>
+        </p:spPr>
+        <p:txBody>
+          <a:bodyPr wrap="square" rtlCol="0" anchor="ctr"/>
+          <a:lstStyle/>
+          <a:p>
+            <a:pPr rtl="1" algn="ctr" indent="0" marL="0">
+              <a:buNone/>
+            </a:pPr>
+            <a:r>
+              <a:rPr lang="en-US" sz="1400" dirty="0" b="1">
+                <a:solidFill>
+                  <a:srgbClr val="1A1A1A"/>
+                </a:solidFill>
+                <a:latin typeface="Calibri" pitchFamily="34" charset="0"/>
+                <a:ea typeface="Calibri" pitchFamily="34" charset="-122"/>
+                <a:cs typeface="Calibri" pitchFamily="34" charset="-120"/>
+              </a:rPr>
+              <a:t>פיתוח מוצר</a:t>
+            </a:r>
+            <a:endParaRPr lang="en-US" sz="1400" dirty="0"/>
+          </a:p>
+        </p:txBody>
+      </p:sp>
+      <p:sp>
+        <p:nvSpPr>
+          <p:cNvPr id="8" name="Text 9"/>
+          <p:cNvSpPr/>
+          <p:nvPr/>
+        </p:nvSpPr>
+        <p:spPr>
+          <a:xfrm>
+            <a:off x="8014716" y="3566160"/>
+            <a:ext cx="3108960" cy="457200"/>
+          </a:xfrm>
+          <a:prstGeom prst="rect">
+            <a:avLst/>
+          </a:prstGeom>
+          <a:noFill/>
+          <a:ln/>
+        </p:spPr>
+        <p:txBody>
+          <a:bodyPr wrap="square" rtlCol="0" anchor="ctr"/>
+          <a:lstStyle/>
+          <a:p>
+            <a:pPr rtl="1" algn="ctr" indent="0" marL="0">
+              <a:buNone/>
+            </a:pPr>
+            <a:r>
+              <a:rPr lang="en-US" sz="1200" dirty="0" b="1">
+                <a:solidFill>
+                  <a:srgbClr val="6B6B6B"/>
+                </a:solidFill>
+                <a:latin typeface="Calibri" pitchFamily="34" charset="0"/>
+                <a:ea typeface="Calibri" pitchFamily="34" charset="-122"/>
+                <a:cs typeface="Calibri" pitchFamily="34" charset="-120"/>
+              </a:rPr>
+              <a:t>הרחבת הצוות הטכנולוגי ופיצ׳רים</a:t>
+            </a:r>
+            <a:endParaRPr lang="en-US" sz="1200" dirty="0"/>
+          </a:p>
+        </p:txBody>
+      </p:sp>
+      <p:sp>
+        <p:nvSpPr>
+          <p:cNvPr id="9" name="Shape 4"/>
+          <p:cNvSpPr/>
+          <p:nvPr/>
+        </p:nvSpPr>
+        <p:spPr>
+          <a:xfrm>
+            <a:off x="4539996" y="1965960"/>
+            <a:ext cx="3108960" cy="2514600"/>
+          </a:xfrm>
+          <a:prstGeom prst="roundRect">
+            <a:avLst>
+              <a:gd name="adj" fmla="val 2609"/>
+            </a:avLst>
+          </a:prstGeom>
+          <a:solidFill>
+            <a:srgbClr val="FFFFFF"/>
+          </a:solidFill>
+          <a:ln/>
+        </p:spPr>
+      </p:sp>
+      <p:sp>
+        <p:nvSpPr>
+          <p:cNvPr id="10" name="Text 5"/>
+          <p:cNvSpPr/>
+          <p:nvPr/>
+        </p:nvSpPr>
+        <p:spPr>
+          <a:xfrm>
+            <a:off x="4539996" y="2194560"/>
+            <a:ext cx="3108960" cy="822960"/>
+          </a:xfrm>
+          <a:prstGeom prst="rect">
+            <a:avLst/>
+          </a:prstGeom>
+          <a:noFill/>
+          <a:ln/>
+        </p:spPr>
+        <p:txBody>
+          <a:bodyPr wrap="square" rtlCol="0" anchor="ctr"/>
+          <a:lstStyle/>
+          <a:p>
+            <a:pPr algn="ctr" indent="0" marL="0">
+              <a:buNone/>
+            </a:pPr>
+            <a:r>
+              <a:rPr lang="en-US" sz="3600" b="1" dirty="0">
+                <a:solidFill>
+                  <a:srgbClr val="7C3AED"/>
+                </a:solidFill>
+              </a:rPr>
+              <a:t>35%</a:t>
+            </a:r>
+            <a:endParaRPr lang="en-US" sz="3600" dirty="0"/>
+          </a:p>
+        </p:txBody>
+      </p:sp>
+      <p:sp>
+        <p:nvSpPr>
+          <p:cNvPr id="11" name="Text 6"/>
+          <p:cNvSpPr/>
+          <p:nvPr/>
+        </p:nvSpPr>
+        <p:spPr>
+          <a:xfrm>
+            <a:off x="4539996" y="3108960"/>
+            <a:ext cx="3108960" cy="457200"/>
+          </a:xfrm>
+          <a:prstGeom prst="rect">
+            <a:avLst/>
+          </a:prstGeom>
+          <a:noFill/>
+          <a:ln/>
+        </p:spPr>
+        <p:txBody>
+          <a:bodyPr wrap="square" rtlCol="0" anchor="ctr"/>
+          <a:lstStyle/>
+          <a:p>
+            <a:pPr rtl="1" algn="ctr" indent="0" marL="0">
+              <a:buNone/>
+            </a:pPr>
+            <a:r>
+              <a:rPr lang="en-US" sz="1400" dirty="0" b="1">
+                <a:solidFill>
+                  <a:srgbClr val="1A1A1A"/>
+                </a:solidFill>
+                <a:latin typeface="Calibri" pitchFamily="34" charset="0"/>
+                <a:ea typeface="Calibri" pitchFamily="34" charset="-122"/>
+                <a:cs typeface="Calibri" pitchFamily="34" charset="-120"/>
+              </a:rPr>
+              <a:t>שיווק ומכירות</a:t>
+            </a:r>
+            <a:endParaRPr lang="en-US" sz="1400" dirty="0"/>
+          </a:p>
+        </p:txBody>
+      </p:sp>
+      <p:sp>
+        <p:nvSpPr>
+          <p:cNvPr id="12" name="Text 6"/>
+          <p:cNvSpPr/>
+          <p:nvPr/>
+        </p:nvSpPr>
+        <p:spPr>
+          <a:xfrm>
+            <a:off x="4539996" y="3566160"/>
+            <a:ext cx="3108960" cy="457200"/>
+          </a:xfrm>
+          <a:prstGeom prst="rect">
+            <a:avLst/>
+          </a:prstGeom>
+          <a:noFill/>
+          <a:ln/>
+        </p:spPr>
+        <p:txBody>
+          <a:bodyPr wrap="square" rtlCol="0" anchor="ctr"/>
+          <a:lstStyle/>
+          <a:p>
+            <a:pPr rtl="1" algn="ctr" indent="0" marL="0">
+              <a:buNone/>
+            </a:pPr>
+            <a:r>
+              <a:rPr lang="en-US" sz="1200" dirty="0" b="1">
+                <a:solidFill>
+                  <a:srgbClr val="6B6B6B"/>
+                </a:solidFill>
+                <a:latin typeface="Calibri" pitchFamily="34" charset="0"/>
+                <a:ea typeface="Calibri" pitchFamily="34" charset="-122"/>
+                <a:cs typeface="Calibri" pitchFamily="34" charset="-120"/>
+              </a:rPr>
+              <a:t>גיוס לקוחות וכניסה לשוק</a:t>
+            </a:r>
+            <a:endParaRPr lang="en-US" sz="1200" dirty="0"/>
+          </a:p>
+        </p:txBody>
+      </p:sp>
+      <p:sp>
+        <p:nvSpPr>
+          <p:cNvPr id="13" name="Shape 1"/>
+          <p:cNvSpPr/>
+          <p:nvPr/>
+        </p:nvSpPr>
+        <p:spPr>
+          <a:xfrm>
+            <a:off x="1065276" y="1965960"/>
+            <a:ext cx="3108960" cy="2514600"/>
+          </a:xfrm>
+          <a:prstGeom prst="roundRect">
+            <a:avLst>
+              <a:gd name="adj" fmla="val 2609"/>
+            </a:avLst>
+          </a:prstGeom>
+          <a:solidFill>
+            <a:srgbClr val="FFFFFF"/>
+          </a:solidFill>
+          <a:ln/>
+        </p:spPr>
+      </p:sp>
+      <p:sp>
+        <p:nvSpPr>
+          <p:cNvPr id="14" name="Text 2"/>
+          <p:cNvSpPr/>
+          <p:nvPr/>
+        </p:nvSpPr>
+        <p:spPr>
+          <a:xfrm>
+            <a:off x="1065276" y="2194560"/>
+            <a:ext cx="3108960" cy="822960"/>
+          </a:xfrm>
+          <a:prstGeom prst="rect">
+            <a:avLst/>
+          </a:prstGeom>
+          <a:noFill/>
+          <a:ln/>
+        </p:spPr>
+        <p:txBody>
+          <a:bodyPr wrap="square" rtlCol="0" anchor="ctr"/>
+          <a:lstStyle/>
+          <a:p>
+            <a:pPr algn="ctr" indent="0" marL="0">
+              <a:buNone/>
+            </a:pPr>
+            <a:r>
+              <a:rPr lang="en-US" sz="3600" b="1" dirty="0">
+                <a:solidFill>
+                  <a:srgbClr val="7C3AED"/>
+                </a:solidFill>
+              </a:rPr>
+              <a:t>25%</a:t>
+            </a:r>
+            <a:endParaRPr lang="en-US" sz="3600" dirty="0"/>
+          </a:p>
+        </p:txBody>
+      </p:sp>
+      <p:sp>
+        <p:nvSpPr>
+          <p:cNvPr id="15" name="Text 3"/>
+          <p:cNvSpPr/>
+          <p:nvPr/>
+        </p:nvSpPr>
+        <p:spPr>
+          <a:xfrm>
+            <a:off x="1065276" y="3108960"/>
+            <a:ext cx="3108960" cy="457200"/>
+          </a:xfrm>
+          <a:prstGeom prst="rect">
+            <a:avLst/>
+          </a:prstGeom>
+          <a:noFill/>
+          <a:ln/>
+        </p:spPr>
+        <p:txBody>
+          <a:bodyPr wrap="square" rtlCol="0" anchor="ctr"/>
+          <a:lstStyle/>
+          <a:p>
+            <a:pPr rtl="1" algn="ctr" indent="0" marL="0">
+              <a:buNone/>
+            </a:pPr>
+            <a:r>
+              <a:rPr lang="en-US" sz="1400" dirty="0" b="1">
+                <a:solidFill>
+                  <a:srgbClr val="1A1A1A"/>
+                </a:solidFill>
+                <a:latin typeface="Calibri" pitchFamily="34" charset="0"/>
+                <a:ea typeface="Calibri" pitchFamily="34" charset="-122"/>
+                <a:cs typeface="Calibri" pitchFamily="34" charset="-120"/>
+              </a:rPr>
+              <a:t>תפעול וגיוס צוות</a:t>
+            </a:r>
+            <a:endParaRPr lang="en-US" sz="1400" dirty="0"/>
+          </a:p>
+        </p:txBody>
+      </p:sp>
+      <p:sp>
+        <p:nvSpPr>
+          <p:cNvPr id="16" name="Text 3"/>
+          <p:cNvSpPr/>
+          <p:nvPr/>
+        </p:nvSpPr>
+        <p:spPr>
+          <a:xfrm>
+            <a:off x="1065276" y="3566160"/>
+            <a:ext cx="3108960" cy="457200"/>
+          </a:xfrm>
+          <a:prstGeom prst="rect">
+            <a:avLst/>
+          </a:prstGeom>
+          <a:noFill/>
+          <a:ln/>
+        </p:spPr>
+        <p:txBody>
+          <a:bodyPr wrap="square" rtlCol="0" anchor="ctr"/>
+          <a:lstStyle/>
+          <a:p>
+            <a:pPr rtl="1" algn="ctr" indent="0" marL="0">
+              <a:buNone/>
+            </a:pPr>
+            <a:r>
+              <a:rPr lang="en-US" sz="1200" dirty="0" b="1">
+                <a:solidFill>
+                  <a:srgbClr val="6B6B6B"/>
+                </a:solidFill>
+                <a:latin typeface="Calibri" pitchFamily="34" charset="0"/>
+                <a:ea typeface="Calibri" pitchFamily="34" charset="-122"/>
+                <a:cs typeface="Calibri" pitchFamily="34" charset="-120"/>
+              </a:rPr>
+              <a:t>שירות לקוחות, כספים ותשתיות</a:t>
+            </a:r>
+            <a:endParaRPr lang="en-US" sz="1200" dirty="0"/>
+          </a:p>
+        </p:txBody>
+      </p:sp>
+      <p:sp>
+        <p:nvSpPr>
+          <p:cNvPr id="17" name="Rounded Rectangle 16"/>
+          <p:cNvSpPr/>
+          <p:nvPr/>
+        </p:nvSpPr>
+        <p:spPr>
+          <a:xfrm>
+            <a:off x="1069848" y="4892040"/>
+            <a:ext cx="2459736" cy="292608"/>
+          </a:xfrm>
+          <a:prstGeom prst="roundRect">
+            <a:avLst/>
+          </a:prstGeom>
+          <a:solidFill>
+            <a:srgbClr val="DDD0F8"/>
+          </a:solidFill>
+          <a:ln>
+            <a:noFill/>
+          </a:ln>
+          <a:effectLst/>
+        </p:spPr>
+        <p:style>
+          <a:lnRef idx="1">
+            <a:schemeClr val="accent1"/>
+          </a:lnRef>
+          <a:fillRef idx="3">
+            <a:schemeClr val="accent1"/>
+          </a:fillRef>
+          <a:effectRef idx="2">
+            <a:schemeClr val="accent1"/>
+          </a:effectRef>
+          <a:fontRef idx="minor">
+            <a:schemeClr val="lt1"/>
+          </a:fontRef>
+        </p:style>
+        <p:txBody>
+          <a:bodyPr rtlCol="0" anchor="ctr"/>
+          <a:lstStyle/>
+          <a:p>
+            <a:pPr algn="ctr"/>
+          </a:p>
+        </p:txBody>
+      </p:sp>
+      <p:sp>
+        <p:nvSpPr>
+          <p:cNvPr id="18" name="Rounded Rectangle 17"/>
+          <p:cNvSpPr/>
+          <p:nvPr/>
+        </p:nvSpPr>
+        <p:spPr>
+          <a:xfrm>
+            <a:off x="3584448" y="4892040"/>
+            <a:ext cx="3465575" cy="292608"/>
+          </a:xfrm>
+          <a:prstGeom prst="roundRect">
+            <a:avLst/>
+          </a:prstGeom>
+          <a:solidFill>
+            <a:srgbClr val="A78BFA"/>
+          </a:solidFill>
+          <a:ln>
+            <a:noFill/>
+          </a:ln>
+          <a:effectLst/>
+        </p:spPr>
+        <p:style>
+          <a:lnRef idx="1">
+            <a:schemeClr val="accent1"/>
+          </a:lnRef>
+          <a:fillRef idx="3">
+            <a:schemeClr val="accent1"/>
+          </a:fillRef>
+          <a:effectRef idx="2">
+            <a:schemeClr val="accent1"/>
+          </a:effectRef>
+          <a:fontRef idx="minor">
+            <a:schemeClr val="lt1"/>
+          </a:fontRef>
+        </p:style>
+        <p:txBody>
+          <a:bodyPr rtlCol="0" anchor="ctr"/>
+          <a:lstStyle/>
+          <a:p>
+            <a:pPr algn="ctr"/>
+          </a:p>
+        </p:txBody>
+      </p:sp>
+      <p:sp>
+        <p:nvSpPr>
+          <p:cNvPr id="19" name="Rounded Rectangle 18"/>
+          <p:cNvSpPr/>
+          <p:nvPr/>
+        </p:nvSpPr>
+        <p:spPr>
+          <a:xfrm>
+            <a:off x="7104888" y="4892040"/>
+            <a:ext cx="3968496" cy="292608"/>
+          </a:xfrm>
+          <a:prstGeom prst="roundRect">
+            <a:avLst/>
+          </a:prstGeom>
+          <a:solidFill>
+            <a:srgbClr val="7C3AED"/>
+          </a:solidFill>
+          <a:ln>
+            <a:noFill/>
+          </a:ln>
+          <a:effectLst/>
+        </p:spPr>
+        <p:style>
+          <a:lnRef idx="1">
+            <a:schemeClr val="accent1"/>
+          </a:lnRef>
+          <a:fillRef idx="3">
+            <a:schemeClr val="accent1"/>
+          </a:fillRef>
+          <a:effectRef idx="2">
+            <a:schemeClr val="accent1"/>
+          </a:effectRef>
+          <a:fontRef idx="minor">
+            <a:schemeClr val="lt1"/>
+          </a:fontRef>
+        </p:style>
+        <p:txBody>
+          <a:bodyPr rtlCol="0" anchor="ctr"/>
+          <a:lstStyle/>
+          <a:p>
+            <a:pPr algn="ctr"/>
           </a:p>
         </p:txBody>
       </p:sp>
